--- a/classes/parte-18-ia-aplicada-a-la-ciberseguridad/333-kali-mcp-orquestar-herramientas-de-kali-desde-un-agente-de-ia/clase-333-presentacion.pptx
+++ b/classes/parte-18-ia-aplicada-a-la-ciberseguridad/333-kali-mcp-orquestar-herramientas-de-kali-desde-un-agente-de-ia/clase-333-presentacion.pptx
@@ -17,6 +17,10 @@
     <p:sldId id="265" r:id="rId16"/>
     <p:sldId id="266" r:id="rId17"/>
     <p:sldId id="267" r:id="rId18"/>
+    <p:sldId id="268" r:id="rId19"/>
+    <p:sldId id="269" r:id="rId20"/>
+    <p:sldId id="270" r:id="rId21"/>
+    <p:sldId id="271" r:id="rId22"/>
   </p:sldIdLst>
   <p:sldSz cx="9144000" cy="6858000" type="screen4x3"/>
   <p:notesSz cx="6858000" cy="9144000"/>
@@ -3198,7 +3202,7 @@
                   <a:srgbClr val="0B3D2E"/>
                 </a:solidFill>
               </a:rPr>
-              <a:t>⚠️ Errores comunes</a:t>
+              <a:t>🧪 Laboratorio guiado</a:t>
             </a:r>
           </a:p>
         </p:txBody>
@@ -3236,67 +3240,82 @@
                   <a:srgbClr val="22282E"/>
                 </a:solidFill>
               </a:rPr>
-              <a:t>•  El contenedor no arranca / healthcheck falla — Revisa Docker y los issues del repo; consulta docs/ del proyecto.</a:t>
-            </a:r>
-          </a:p>
-          <a:p>
-            <a:pPr>
-              <a:spcAft>
-                <a:spcPts val="600"/>
-              </a:spcAft>
-            </a:pPr>
-            <a:r>
-              <a:rPr sz="1500">
-                <a:solidFill>
-                  <a:srgbClr val="22282E"/>
-                </a:solidFill>
-              </a:rPr>
-              <a:t>•  El agente propone tocar IPs fuera de alcance — Corta y redefine el scope; nunca amplíes a objetivos no autorizados.</a:t>
-            </a:r>
-          </a:p>
-          <a:p>
-            <a:pPr>
-              <a:spcAft>
-                <a:spcPts val="600"/>
-              </a:spcAft>
-            </a:pPr>
-            <a:r>
-              <a:rPr sz="1500">
-                <a:solidFill>
-                  <a:srgbClr val="22282E"/>
-                </a:solidFill>
-              </a:rPr>
-              <a:t>•  Hallazgos que no puedes reproducir — Posible alucinación o mala interpretación. Verifica a mano antes de reportar.</a:t>
-            </a:r>
-          </a:p>
-          <a:p>
-            <a:pPr>
-              <a:spcAft>
-                <a:spcPts val="600"/>
-              </a:spcAft>
-            </a:pPr>
-            <a:r>
-              <a:rPr sz="1500">
-                <a:solidFill>
-                  <a:srgbClr val="22282E"/>
-                </a:solidFill>
-              </a:rPr>
-              <a:t>•  El contenedor tiene salida a Internet — Aíslalo; un lab ofensivo no debe poder alcanzar terceros.</a:t>
-            </a:r>
-          </a:p>
-          <a:p>
-            <a:pPr>
-              <a:spcAft>
-                <a:spcPts val="600"/>
-              </a:spcAft>
-            </a:pPr>
-            <a:r>
-              <a:rPr sz="1500">
-                <a:solidFill>
-                  <a:srgbClr val="22282E"/>
-                </a:solidFill>
-              </a:rPr>
-              <a:t>•  Ejecutar /kali-pentest sin leer qué hace — Entiende cada fase; tú eres responsable de las acciones.</a:t>
+              <a:t>•  Clonar e inicializar (según el README oficial del proyecto):</a:t>
+            </a:r>
+          </a:p>
+          <a:p>
+            <a:pPr>
+              <a:spcAft>
+                <a:spcPts val="600"/>
+              </a:spcAft>
+            </a:pPr>
+            <a:r>
+              <a:rPr sz="1500">
+                <a:solidFill>
+                  <a:srgbClr val="22282E"/>
+                </a:solidFill>
+              </a:rPr>
+              <a:t>•  Conectar el agente. Configura tu cliente de IA para usar el servidor MCP de kali-mcp (archivo de configuración .mcp.json del proyecto).</a:t>
+            </a:r>
+          </a:p>
+          <a:p>
+            <a:pPr>
+              <a:spcAft>
+                <a:spcPts val="600"/>
+              </a:spcAft>
+            </a:pPr>
+            <a:r>
+              <a:rPr sz="1500">
+                <a:solidFill>
+                  <a:srgbClr val="22282E"/>
+                </a:solidFill>
+              </a:rPr>
+              <a:t>•  Definir alcance. Ejecuta el flujo de inicio y declara solo la IP de tu VM de laboratorio como objetivo autorizado.</a:t>
+            </a:r>
+          </a:p>
+          <a:p>
+            <a:pPr>
+              <a:spcAft>
+                <a:spcPts val="600"/>
+              </a:spcAft>
+            </a:pPr>
+            <a:r>
+              <a:rPr sz="1500">
+                <a:solidFill>
+                  <a:srgbClr val="22282E"/>
+                </a:solidFill>
+              </a:rPr>
+              <a:t>•  Observar, no delegar a ciegas. Pide un reconocimiento y revisa cada herramienta que el agente propone antes de aprobar acciones activas.</a:t>
+            </a:r>
+          </a:p>
+          <a:p>
+            <a:pPr>
+              <a:spcAft>
+                <a:spcPts val="600"/>
+              </a:spcAft>
+            </a:pPr>
+            <a:r>
+              <a:rPr sz="1500">
+                <a:solidFill>
+                  <a:srgbClr val="22282E"/>
+                </a:solidFill>
+              </a:rPr>
+              <a:t>•  Cerrar. Genera el informe de la sesión y compáralo con lo que observaste: ¿los hallazgos son reales y verificables?</a:t>
+            </a:r>
+          </a:p>
+          <a:p>
+            <a:pPr>
+              <a:spcAft>
+                <a:spcPts val="600"/>
+              </a:spcAft>
+            </a:pPr>
+            <a:r>
+              <a:rPr sz="1500">
+                <a:solidFill>
+                  <a:srgbClr val="22282E"/>
+                </a:solidFill>
+              </a:rPr>
+              <a:t>•  Aislamiento. Confirma que el contenedor no tiene acceso a redes fuera de tu laboratorio.</a:t>
             </a:r>
           </a:p>
         </p:txBody>
@@ -3347,7 +3366,7 @@
                   <a:srgbClr val="0B3D2E"/>
                 </a:solidFill>
               </a:rPr>
-              <a:t>❓ Preguntas frecuentes</a:t>
+              <a:t>✍️ Ejercicios</a:t>
             </a:r>
           </a:p>
         </p:txBody>
@@ -3385,97 +3404,67 @@
                   <a:srgbClr val="22282E"/>
                 </a:solidFill>
               </a:rPr>
-              <a:t>•  ❓ ¿Es legal usar kali-mcp?</a:t>
-            </a:r>
-          </a:p>
-          <a:p>
-            <a:pPr>
-              <a:spcAft>
-                <a:spcPts val="600"/>
-              </a:spcAft>
-            </a:pPr>
-            <a:r>
-              <a:rPr sz="1500">
-                <a:solidFill>
-                  <a:srgbClr val="22282E"/>
-                </a:solidFill>
-              </a:rPr>
-              <a:t>•  La herramienta sí (es MIT y educativa). Lo que puede ser ilegal es usarla contra objetivos</a:t>
-            </a:r>
-          </a:p>
-          <a:p>
-            <a:pPr>
-              <a:spcAft>
-                <a:spcPts val="600"/>
-              </a:spcAft>
-            </a:pPr>
-            <a:r>
-              <a:rPr sz="1500">
-                <a:solidFill>
-                  <a:srgbClr val="22282E"/>
-                </a:solidFill>
-              </a:rPr>
-              <a:t>•  sin autorización. Limítate a tus sistemas o a engagements con permiso escrito.</a:t>
-            </a:r>
-          </a:p>
-          <a:p>
-            <a:pPr>
-              <a:spcAft>
-                <a:spcPts val="600"/>
-              </a:spcAft>
-            </a:pPr>
-            <a:r>
-              <a:rPr sz="1500">
-                <a:solidFill>
-                  <a:srgbClr val="22282E"/>
-                </a:solidFill>
-              </a:rPr>
-              <a:t>•  ❓ ¿La IA "hackea sola"?</a:t>
-            </a:r>
-          </a:p>
-          <a:p>
-            <a:pPr>
-              <a:spcAft>
-                <a:spcPts val="600"/>
-              </a:spcAft>
-            </a:pPr>
-            <a:r>
-              <a:rPr sz="1500">
-                <a:solidFill>
-                  <a:srgbClr val="22282E"/>
-                </a:solidFill>
-              </a:rPr>
-              <a:t>•  No. Propone y ejecuta herramientas, pero tú defines el alcance, apruebas las acciones y</a:t>
-            </a:r>
-          </a:p>
-          <a:p>
-            <a:pPr>
-              <a:spcAft>
-                <a:spcPts val="600"/>
-              </a:spcAft>
-            </a:pPr>
-            <a:r>
-              <a:rPr sz="1500">
-                <a:solidFill>
-                  <a:srgbClr val="22282E"/>
-                </a:solidFill>
-              </a:rPr>
-              <a:t>•  validas los resultados. Es un copiloto, no un piloto automático.</a:t>
-            </a:r>
-          </a:p>
-          <a:p>
-            <a:pPr>
-              <a:spcAft>
-                <a:spcPts val="600"/>
-              </a:spcAft>
-            </a:pPr>
-            <a:r>
-              <a:rPr sz="1500">
-                <a:solidFill>
-                  <a:srgbClr val="22282E"/>
-                </a:solidFill>
-              </a:rPr>
-              <a:t>•  ❓ ¿Reemplaza aprender las herramientas?</a:t>
+              <a:t>•  Dibuja la arquitectura de kali-mcp e indica dónde está el aislamiento.</a:t>
+            </a:r>
+          </a:p>
+          <a:p>
+            <a:pPr>
+              <a:spcAft>
+                <a:spcPts val="600"/>
+              </a:spcAft>
+            </a:pPr>
+            <a:r>
+              <a:rPr sz="1500">
+                <a:solidFill>
+                  <a:srgbClr val="22282E"/>
+                </a:solidFill>
+              </a:rPr>
+              <a:t>•  ¿Por qué es importante que las herramientas corran en un contenedor y no en tu host?</a:t>
+            </a:r>
+          </a:p>
+          <a:p>
+            <a:pPr>
+              <a:spcAft>
+                <a:spcPts val="600"/>
+              </a:spcAft>
+            </a:pPr>
+            <a:r>
+              <a:rPr sz="1500">
+                <a:solidFill>
+                  <a:srgbClr val="22282E"/>
+                </a:solidFill>
+              </a:rPr>
+              <a:t>•  Define el alcance correcto para un lab con una sola VM objetivo.</a:t>
+            </a:r>
+          </a:p>
+          <a:p>
+            <a:pPr>
+              <a:spcAft>
+                <a:spcPts val="600"/>
+              </a:spcAft>
+            </a:pPr>
+            <a:r>
+              <a:rPr sz="1500">
+                <a:solidFill>
+                  <a:srgbClr val="22282E"/>
+                </a:solidFill>
+              </a:rPr>
+              <a:t>•  Enumera 3 acciones que exigirías aprobar manualmente aunque el agente las proponga.</a:t>
+            </a:r>
+          </a:p>
+          <a:p>
+            <a:pPr>
+              <a:spcAft>
+                <a:spcPts val="600"/>
+              </a:spcAft>
+            </a:pPr>
+            <a:r>
+              <a:rPr sz="1500">
+                <a:solidFill>
+                  <a:srgbClr val="22282E"/>
+                </a:solidFill>
+              </a:rPr>
+              <a:t>•  ¿Cómo verificarías que un hallazgo del informe no es una alucinación?</a:t>
             </a:r>
           </a:p>
         </p:txBody>
@@ -3526,7 +3515,7 @@
                   <a:srgbClr val="0B3D2E"/>
                 </a:solidFill>
               </a:rPr>
-              <a:t>🔗 Referencias</a:t>
+              <a:t>📝 Reto verificable</a:t>
             </a:r>
           </a:p>
         </p:txBody>
@@ -3564,6 +3553,483 @@
                   <a:srgbClr val="22282E"/>
                 </a:solidFill>
               </a:rPr>
+              <a:t>•  Monta kali-mcp contra una VM vulnerable de tu propiedad y ejecuta un flujo de</a:t>
+            </a:r>
+          </a:p>
+          <a:p>
+            <a:pPr>
+              <a:spcAft>
+                <a:spcPts val="600"/>
+              </a:spcAft>
+            </a:pPr>
+            <a:r>
+              <a:rPr sz="1500">
+                <a:solidFill>
+                  <a:srgbClr val="22282E"/>
+                </a:solidFill>
+              </a:rPr>
+              <a:t>•  reconocimiento supervisado, terminando con un informe.</a:t>
+            </a:r>
+          </a:p>
+          <a:p>
+            <a:pPr>
+              <a:spcAft>
+                <a:spcPts val="600"/>
+              </a:spcAft>
+            </a:pPr>
+            <a:r>
+              <a:rPr sz="1500">
+                <a:solidFill>
+                  <a:srgbClr val="22282E"/>
+                </a:solidFill>
+              </a:rPr>
+              <a:t>•  Criterio de aceptación: el alcance se limitó a tu VM; aprobaste manualmente las acciones</a:t>
+            </a:r>
+          </a:p>
+          <a:p>
+            <a:pPr>
+              <a:spcAft>
+                <a:spcPts val="600"/>
+              </a:spcAft>
+            </a:pPr>
+            <a:r>
+              <a:rPr sz="1500">
+                <a:solidFill>
+                  <a:srgbClr val="22282E"/>
+                </a:solidFill>
+              </a:rPr>
+              <a:t>•  activas; el informe lista hallazgos que puedes reproducir manualmente con la herramienta</a:t>
+            </a:r>
+          </a:p>
+          <a:p>
+            <a:pPr>
+              <a:spcAft>
+                <a:spcPts val="600"/>
+              </a:spcAft>
+            </a:pPr>
+            <a:r>
+              <a:rPr sz="1500">
+                <a:solidFill>
+                  <a:srgbClr val="22282E"/>
+                </a:solidFill>
+              </a:rPr>
+              <a:t>•  correspondiente (no confías ciegamente en la IA).</a:t>
+            </a:r>
+          </a:p>
+        </p:txBody>
+      </p:sp>
+    </p:spTree>
+  </p:cSld>
+  <p:clrMapOvr>
+    <a:masterClrMapping/>
+  </p:clrMapOvr>
+</p:sld>
+</file>
+
+<file path=ppt/slides/slide13.xml><?xml version="1.0" encoding="utf-8"?>
+<p:sld xmlns:a="http://schemas.openxmlformats.org/drawingml/2006/main" xmlns:p="http://schemas.openxmlformats.org/presentationml/2006/main" xmlns:r="http://schemas.openxmlformats.org/officeDocument/2006/relationships">
+  <p:cSld>
+    <p:spTree>
+      <p:nvGrpSpPr>
+        <p:cNvPr id="1" name=""/>
+        <p:cNvGrpSpPr/>
+        <p:nvPr/>
+      </p:nvGrpSpPr>
+      <p:grpSpPr/>
+      <p:sp>
+        <p:nvSpPr>
+          <p:cNvPr id="2" name="TextBox 1"/>
+          <p:cNvSpPr txBox="1"/>
+          <p:nvPr/>
+        </p:nvSpPr>
+        <p:spPr>
+          <a:xfrm>
+            <a:off x="457200" y="320040"/>
+            <a:ext cx="8229600" cy="822960"/>
+          </a:xfrm>
+          <a:prstGeom prst="rect">
+            <a:avLst/>
+          </a:prstGeom>
+          <a:noFill/>
+        </p:spPr>
+        <p:txBody>
+          <a:bodyPr wrap="square">
+            <a:spAutoFit/>
+          </a:bodyPr>
+          <a:lstStyle/>
+          <a:p>
+            <a:r>
+              <a:rPr sz="2600" b="1">
+                <a:solidFill>
+                  <a:srgbClr val="0B3D2E"/>
+                </a:solidFill>
+              </a:rPr>
+              <a:t>⚠️ Errores comunes</a:t>
+            </a:r>
+          </a:p>
+        </p:txBody>
+      </p:sp>
+      <p:sp>
+        <p:nvSpPr>
+          <p:cNvPr id="3" name="TextBox 2"/>
+          <p:cNvSpPr txBox="1"/>
+          <p:nvPr/>
+        </p:nvSpPr>
+        <p:spPr>
+          <a:xfrm>
+            <a:off x="457200" y="1280160"/>
+            <a:ext cx="8229600" cy="4937760"/>
+          </a:xfrm>
+          <a:prstGeom prst="rect">
+            <a:avLst/>
+          </a:prstGeom>
+          <a:noFill/>
+        </p:spPr>
+        <p:txBody>
+          <a:bodyPr wrap="square">
+            <a:spAutoFit/>
+          </a:bodyPr>
+          <a:lstStyle/>
+          <a:p>
+            <a:pPr>
+              <a:spcAft>
+                <a:spcPts val="600"/>
+              </a:spcAft>
+            </a:pPr>
+            <a:r>
+              <a:rPr sz="1500">
+                <a:solidFill>
+                  <a:srgbClr val="22282E"/>
+                </a:solidFill>
+              </a:rPr>
+              <a:t>•  El contenedor no arranca / healthcheck falla — Revisa Docker y los issues del repo; consulta docs/ del proyecto.</a:t>
+            </a:r>
+          </a:p>
+          <a:p>
+            <a:pPr>
+              <a:spcAft>
+                <a:spcPts val="600"/>
+              </a:spcAft>
+            </a:pPr>
+            <a:r>
+              <a:rPr sz="1500">
+                <a:solidFill>
+                  <a:srgbClr val="22282E"/>
+                </a:solidFill>
+              </a:rPr>
+              <a:t>•  El agente propone tocar IPs fuera de alcance — Corta y redefine el scope; nunca amplíes a objetivos no autorizados.</a:t>
+            </a:r>
+          </a:p>
+          <a:p>
+            <a:pPr>
+              <a:spcAft>
+                <a:spcPts val="600"/>
+              </a:spcAft>
+            </a:pPr>
+            <a:r>
+              <a:rPr sz="1500">
+                <a:solidFill>
+                  <a:srgbClr val="22282E"/>
+                </a:solidFill>
+              </a:rPr>
+              <a:t>•  Hallazgos que no puedes reproducir — Posible alucinación o mala interpretación. Verifica a mano antes de reportar.</a:t>
+            </a:r>
+          </a:p>
+          <a:p>
+            <a:pPr>
+              <a:spcAft>
+                <a:spcPts val="600"/>
+              </a:spcAft>
+            </a:pPr>
+            <a:r>
+              <a:rPr sz="1500">
+                <a:solidFill>
+                  <a:srgbClr val="22282E"/>
+                </a:solidFill>
+              </a:rPr>
+              <a:t>•  El contenedor tiene salida a Internet — Aíslalo; un lab ofensivo no debe poder alcanzar terceros.</a:t>
+            </a:r>
+          </a:p>
+          <a:p>
+            <a:pPr>
+              <a:spcAft>
+                <a:spcPts val="600"/>
+              </a:spcAft>
+            </a:pPr>
+            <a:r>
+              <a:rPr sz="1500">
+                <a:solidFill>
+                  <a:srgbClr val="22282E"/>
+                </a:solidFill>
+              </a:rPr>
+              <a:t>•  Ejecutar /kali-pentest sin leer qué hace — Entiende cada fase; tú eres responsable de las acciones.</a:t>
+            </a:r>
+          </a:p>
+        </p:txBody>
+      </p:sp>
+    </p:spTree>
+  </p:cSld>
+  <p:clrMapOvr>
+    <a:masterClrMapping/>
+  </p:clrMapOvr>
+</p:sld>
+</file>
+
+<file path=ppt/slides/slide14.xml><?xml version="1.0" encoding="utf-8"?>
+<p:sld xmlns:a="http://schemas.openxmlformats.org/drawingml/2006/main" xmlns:p="http://schemas.openxmlformats.org/presentationml/2006/main" xmlns:r="http://schemas.openxmlformats.org/officeDocument/2006/relationships">
+  <p:cSld>
+    <p:spTree>
+      <p:nvGrpSpPr>
+        <p:cNvPr id="1" name=""/>
+        <p:cNvGrpSpPr/>
+        <p:nvPr/>
+      </p:nvGrpSpPr>
+      <p:grpSpPr/>
+      <p:sp>
+        <p:nvSpPr>
+          <p:cNvPr id="2" name="TextBox 1"/>
+          <p:cNvSpPr txBox="1"/>
+          <p:nvPr/>
+        </p:nvSpPr>
+        <p:spPr>
+          <a:xfrm>
+            <a:off x="457200" y="320040"/>
+            <a:ext cx="8229600" cy="822960"/>
+          </a:xfrm>
+          <a:prstGeom prst="rect">
+            <a:avLst/>
+          </a:prstGeom>
+          <a:noFill/>
+        </p:spPr>
+        <p:txBody>
+          <a:bodyPr wrap="square">
+            <a:spAutoFit/>
+          </a:bodyPr>
+          <a:lstStyle/>
+          <a:p>
+            <a:r>
+              <a:rPr sz="2600" b="1">
+                <a:solidFill>
+                  <a:srgbClr val="0B3D2E"/>
+                </a:solidFill>
+              </a:rPr>
+              <a:t>❓ Preguntas frecuentes</a:t>
+            </a:r>
+          </a:p>
+        </p:txBody>
+      </p:sp>
+      <p:sp>
+        <p:nvSpPr>
+          <p:cNvPr id="3" name="TextBox 2"/>
+          <p:cNvSpPr txBox="1"/>
+          <p:nvPr/>
+        </p:nvSpPr>
+        <p:spPr>
+          <a:xfrm>
+            <a:off x="457200" y="1280160"/>
+            <a:ext cx="8229600" cy="4937760"/>
+          </a:xfrm>
+          <a:prstGeom prst="rect">
+            <a:avLst/>
+          </a:prstGeom>
+          <a:noFill/>
+        </p:spPr>
+        <p:txBody>
+          <a:bodyPr wrap="square">
+            <a:spAutoFit/>
+          </a:bodyPr>
+          <a:lstStyle/>
+          <a:p>
+            <a:pPr>
+              <a:spcAft>
+                <a:spcPts val="600"/>
+              </a:spcAft>
+            </a:pPr>
+            <a:r>
+              <a:rPr sz="1500">
+                <a:solidFill>
+                  <a:srgbClr val="22282E"/>
+                </a:solidFill>
+              </a:rPr>
+              <a:t>•  ❓ ¿Es legal usar kali-mcp?</a:t>
+            </a:r>
+          </a:p>
+          <a:p>
+            <a:pPr>
+              <a:spcAft>
+                <a:spcPts val="600"/>
+              </a:spcAft>
+            </a:pPr>
+            <a:r>
+              <a:rPr sz="1500">
+                <a:solidFill>
+                  <a:srgbClr val="22282E"/>
+                </a:solidFill>
+              </a:rPr>
+              <a:t>•  La herramienta sí (es MIT y educativa). Lo que puede ser ilegal es usarla contra objetivos</a:t>
+            </a:r>
+          </a:p>
+          <a:p>
+            <a:pPr>
+              <a:spcAft>
+                <a:spcPts val="600"/>
+              </a:spcAft>
+            </a:pPr>
+            <a:r>
+              <a:rPr sz="1500">
+                <a:solidFill>
+                  <a:srgbClr val="22282E"/>
+                </a:solidFill>
+              </a:rPr>
+              <a:t>•  sin autorización. Limítate a tus sistemas o a engagements con permiso escrito.</a:t>
+            </a:r>
+          </a:p>
+          <a:p>
+            <a:pPr>
+              <a:spcAft>
+                <a:spcPts val="600"/>
+              </a:spcAft>
+            </a:pPr>
+            <a:r>
+              <a:rPr sz="1500">
+                <a:solidFill>
+                  <a:srgbClr val="22282E"/>
+                </a:solidFill>
+              </a:rPr>
+              <a:t>•  ❓ ¿La IA "hackea sola"?</a:t>
+            </a:r>
+          </a:p>
+          <a:p>
+            <a:pPr>
+              <a:spcAft>
+                <a:spcPts val="600"/>
+              </a:spcAft>
+            </a:pPr>
+            <a:r>
+              <a:rPr sz="1500">
+                <a:solidFill>
+                  <a:srgbClr val="22282E"/>
+                </a:solidFill>
+              </a:rPr>
+              <a:t>•  No. Propone y ejecuta herramientas, pero tú defines el alcance, apruebas las acciones y</a:t>
+            </a:r>
+          </a:p>
+          <a:p>
+            <a:pPr>
+              <a:spcAft>
+                <a:spcPts val="600"/>
+              </a:spcAft>
+            </a:pPr>
+            <a:r>
+              <a:rPr sz="1500">
+                <a:solidFill>
+                  <a:srgbClr val="22282E"/>
+                </a:solidFill>
+              </a:rPr>
+              <a:t>•  validas los resultados. Es un copiloto, no un piloto automático.</a:t>
+            </a:r>
+          </a:p>
+          <a:p>
+            <a:pPr>
+              <a:spcAft>
+                <a:spcPts val="600"/>
+              </a:spcAft>
+            </a:pPr>
+            <a:r>
+              <a:rPr sz="1500">
+                <a:solidFill>
+                  <a:srgbClr val="22282E"/>
+                </a:solidFill>
+              </a:rPr>
+              <a:t>•  ❓ ¿Reemplaza aprender las herramientas?</a:t>
+            </a:r>
+          </a:p>
+        </p:txBody>
+      </p:sp>
+    </p:spTree>
+  </p:cSld>
+  <p:clrMapOvr>
+    <a:masterClrMapping/>
+  </p:clrMapOvr>
+</p:sld>
+</file>
+
+<file path=ppt/slides/slide15.xml><?xml version="1.0" encoding="utf-8"?>
+<p:sld xmlns:a="http://schemas.openxmlformats.org/drawingml/2006/main" xmlns:p="http://schemas.openxmlformats.org/presentationml/2006/main" xmlns:r="http://schemas.openxmlformats.org/officeDocument/2006/relationships">
+  <p:cSld>
+    <p:spTree>
+      <p:nvGrpSpPr>
+        <p:cNvPr id="1" name=""/>
+        <p:cNvGrpSpPr/>
+        <p:nvPr/>
+      </p:nvGrpSpPr>
+      <p:grpSpPr/>
+      <p:sp>
+        <p:nvSpPr>
+          <p:cNvPr id="2" name="TextBox 1"/>
+          <p:cNvSpPr txBox="1"/>
+          <p:nvPr/>
+        </p:nvSpPr>
+        <p:spPr>
+          <a:xfrm>
+            <a:off x="457200" y="320040"/>
+            <a:ext cx="8229600" cy="822960"/>
+          </a:xfrm>
+          <a:prstGeom prst="rect">
+            <a:avLst/>
+          </a:prstGeom>
+          <a:noFill/>
+        </p:spPr>
+        <p:txBody>
+          <a:bodyPr wrap="square">
+            <a:spAutoFit/>
+          </a:bodyPr>
+          <a:lstStyle/>
+          <a:p>
+            <a:r>
+              <a:rPr sz="2600" b="1">
+                <a:solidFill>
+                  <a:srgbClr val="0B3D2E"/>
+                </a:solidFill>
+              </a:rPr>
+              <a:t>🔗 Referencias</a:t>
+            </a:r>
+          </a:p>
+        </p:txBody>
+      </p:sp>
+      <p:sp>
+        <p:nvSpPr>
+          <p:cNvPr id="3" name="TextBox 2"/>
+          <p:cNvSpPr txBox="1"/>
+          <p:nvPr/>
+        </p:nvSpPr>
+        <p:spPr>
+          <a:xfrm>
+            <a:off x="457200" y="1280160"/>
+            <a:ext cx="8229600" cy="4937760"/>
+          </a:xfrm>
+          <a:prstGeom prst="rect">
+            <a:avLst/>
+          </a:prstGeom>
+          <a:noFill/>
+        </p:spPr>
+        <p:txBody>
+          <a:bodyPr wrap="square">
+            <a:spAutoFit/>
+          </a:bodyPr>
+          <a:lstStyle/>
+          <a:p>
+            <a:pPr>
+              <a:spcAft>
+                <a:spcPts val="600"/>
+              </a:spcAft>
+            </a:pPr>
+            <a:r>
+              <a:rPr sz="1500">
+                <a:solidFill>
+                  <a:srgbClr val="22282E"/>
+                </a:solidFill>
+              </a:rPr>
               <a:t>•  kali-mcp (MIT) — &lt;https://github.com/pabpereza/kali-mcp&gt; (documentación y comandos oficiales).</a:t>
             </a:r>
           </a:p>
@@ -3597,8 +4063,98 @@
               <a:t>•  Lab: pentest asistido por IA con MCP del programa.</a:t>
             </a:r>
           </a:p>
-        </p:txBody>
-      </p:sp>
+          <a:p>
+            <a:pPr>
+              <a:spcAft>
+                <a:spcPts val="600"/>
+              </a:spcAft>
+            </a:pPr>
+            <a:r>
+              <a:rPr sz="1500">
+                <a:solidFill>
+                  <a:srgbClr val="22282E"/>
+                </a:solidFill>
+              </a:rPr>
+              <a:t>•  Catálogo de playbooks de kali-mcp mapeados al curso.</a:t>
+            </a:r>
+          </a:p>
+        </p:txBody>
+      </p:sp>
+    </p:spTree>
+  </p:cSld>
+  <p:clrMapOvr>
+    <a:masterClrMapping/>
+  </p:clrMapOvr>
+</p:sld>
+</file>
+
+<file path=ppt/slides/slide16.xml><?xml version="1.0" encoding="utf-8"?>
+<p:sld xmlns:a="http://schemas.openxmlformats.org/drawingml/2006/main" xmlns:p="http://schemas.openxmlformats.org/presentationml/2006/main" xmlns:r="http://schemas.openxmlformats.org/officeDocument/2006/relationships">
+  <p:cSld>
+    <p:spTree>
+      <p:nvGrpSpPr>
+        <p:cNvPr id="1" name=""/>
+        <p:cNvGrpSpPr/>
+        <p:nvPr/>
+      </p:nvGrpSpPr>
+      <p:grpSpPr/>
+      <p:sp>
+        <p:nvSpPr>
+          <p:cNvPr id="2" name="TextBox 1"/>
+          <p:cNvSpPr txBox="1"/>
+          <p:nvPr/>
+        </p:nvSpPr>
+        <p:spPr>
+          <a:xfrm>
+            <a:off x="457200" y="274320"/>
+            <a:ext cx="8229600" cy="640080"/>
+          </a:xfrm>
+          <a:prstGeom prst="rect">
+            <a:avLst/>
+          </a:prstGeom>
+          <a:noFill/>
+        </p:spPr>
+        <p:txBody>
+          <a:bodyPr wrap="square">
+            <a:spAutoFit/>
+          </a:bodyPr>
+          <a:lstStyle/>
+          <a:p>
+            <a:r>
+              <a:rPr sz="2200" b="1">
+                <a:solidFill>
+                  <a:srgbClr val="0B3D2E"/>
+                </a:solidFill>
+              </a:rPr>
+              <a:t>Diagrama de la clase</a:t>
+            </a:r>
+          </a:p>
+        </p:txBody>
+      </p:sp>
+      <p:pic>
+        <p:nvPicPr>
+          <p:cNvPr id="3" name="Picture 2" descr="18544e843a3c49c4.png"/>
+          <p:cNvPicPr>
+            <a:picLocks noChangeAspect="1"/>
+          </p:cNvPicPr>
+          <p:nvPr/>
+        </p:nvPicPr>
+        <p:blipFill>
+          <a:blip r:embed="rId2"/>
+          <a:stretch>
+            <a:fillRect/>
+          </a:stretch>
+        </p:blipFill>
+        <p:spPr>
+          <a:xfrm>
+            <a:off x="457200" y="3319776"/>
+            <a:ext cx="8229600" cy="858527"/>
+          </a:xfrm>
+          <a:prstGeom prst="rect">
+            <a:avLst/>
+          </a:prstGeom>
+        </p:spPr>
+      </p:pic>
     </p:spTree>
   </p:cSld>
   <p:clrMapOvr>
@@ -4107,7 +4663,7 @@
                   <a:srgbClr val="0B3D2E"/>
                 </a:solidFill>
               </a:rPr>
-              <a:t>📖 Definiciones y características</a:t>
+              <a:t>🧠 Explicación en profundidad</a:t>
             </a:r>
           </a:p>
         </p:txBody>
@@ -4145,97 +4701,37 @@
                   <a:srgbClr val="22282E"/>
                 </a:solidFill>
               </a:rPr>
-              <a:t>•  kali-mcp</a:t>
-            </a:r>
-          </a:p>
-          <a:p>
-            <a:pPr>
-              <a:spcAft>
-                <a:spcPts val="600"/>
-              </a:spcAft>
-            </a:pPr>
-            <a:r>
-              <a:rPr sz="1500">
-                <a:solidFill>
-                  <a:srgbClr val="22282E"/>
-                </a:solidFill>
-              </a:rPr>
-              <a:t>•  Proyecto MIT que expone las herramientas de Kali a un agente de IA vía MCP. Característica clave: las herramientas corren en un contenedor Docker aislado, no en tu host.</a:t>
-            </a:r>
-          </a:p>
-          <a:p>
-            <a:pPr>
-              <a:spcAft>
-                <a:spcPts val="600"/>
-              </a:spcAft>
-            </a:pPr>
-            <a:r>
-              <a:rPr sz="1500">
-                <a:solidFill>
-                  <a:srgbClr val="22282E"/>
-                </a:solidFill>
-              </a:rPr>
-              <a:t>•  Gateway MCP</a:t>
-            </a:r>
-          </a:p>
-          <a:p>
-            <a:pPr>
-              <a:spcAft>
-                <a:spcPts val="600"/>
-              </a:spcAft>
-            </a:pPr>
-            <a:r>
-              <a:rPr sz="1500">
-                <a:solidFill>
-                  <a:srgbClr val="22282E"/>
-                </a:solidFill>
-              </a:rPr>
-              <a:t>•  Componente que traduce las peticiones del protocolo MCP en ejecuciones de herramientas dentro del contenedor y devuelve los resultados al agente.</a:t>
-            </a:r>
-          </a:p>
-          <a:p>
-            <a:pPr>
-              <a:spcAft>
-                <a:spcPts val="600"/>
-              </a:spcAft>
-            </a:pPr>
-            <a:r>
-              <a:rPr sz="1500">
-                <a:solidFill>
-                  <a:srgbClr val="22282E"/>
-                </a:solidFill>
-              </a:rPr>
-              <a:t>•  Comando de flujo (/kali-start, /kali-pentest, /kali-finish)</a:t>
-            </a:r>
-          </a:p>
-          <a:p>
-            <a:pPr>
-              <a:spcAft>
-                <a:spcPts val="600"/>
-              </a:spcAft>
-            </a:pPr>
-            <a:r>
-              <a:rPr sz="1500">
-                <a:solidFill>
-                  <a:srgbClr val="22282E"/>
-                </a:solidFill>
-              </a:rPr>
-              <a:t>•  Playbooks de alto nivel que definen alcance, orquestan el análisis y compilan el informe, respectivamente.</a:t>
-            </a:r>
-          </a:p>
-          <a:p>
-            <a:pPr>
-              <a:spcAft>
-                <a:spcPts val="600"/>
-              </a:spcAft>
-            </a:pPr>
-            <a:r>
-              <a:rPr sz="1500">
-                <a:solidFill>
-                  <a:srgbClr val="22282E"/>
-                </a:solidFill>
-              </a:rPr>
-              <a:t>•  Alcance (scope)</a:t>
+              <a:t>•  Orquestar Kali concentra autoridad: parámetros generados pueden escanear, modificar o exfiltrar. La arquitectura limita comandos, destinos, credenciales, red, tiempo y salida; un contenedor no basta…</a:t>
+            </a:r>
+          </a:p>
+          <a:p>
+            <a:pPr>
+              <a:spcAft>
+                <a:spcPts val="600"/>
+              </a:spcAft>
+            </a:pPr>
+            <a:r>
+              <a:rPr sz="1500">
+                <a:solidFill>
+                  <a:srgbClr val="22282E"/>
+                </a:solidFill>
+              </a:rPr>
+              <a:t>•  El diagrama separa lenguaje de autoridad. El modelo puede proponer; la política determina si la operación pertenece al alcance; la herramienta produce evidencia; y una persona o control determinista…</a:t>
+            </a:r>
+          </a:p>
+          <a:p>
+            <a:pPr>
+              <a:spcAft>
+                <a:spcPts val="600"/>
+              </a:spcAft>
+            </a:pPr>
+            <a:r>
+              <a:rPr sz="1500">
+                <a:solidFill>
+                  <a:srgbClr val="22282E"/>
+                </a:solidFill>
+              </a:rPr>
+              <a:t>•  El agente propone un rango fuera del contrato. El broker rechaza el destino antes de que la herramienta lo reciba.</a:t>
             </a:r>
           </a:p>
         </p:txBody>
@@ -4286,7 +4782,7 @@
                   <a:srgbClr val="0B3D2E"/>
                 </a:solidFill>
               </a:rPr>
-              <a:t>🧰 Herramientas y preparación</a:t>
+              <a:t>📔 Glosario operativo</a:t>
             </a:r>
           </a:p>
         </p:txBody>
@@ -4324,52 +4820,52 @@
                   <a:srgbClr val="22282E"/>
                 </a:solidFill>
               </a:rPr>
-              <a:t>•  Docker y Docker Compose (clase 022) y un cliente de IA con MCP (p. ej. Claude Code).</a:t>
-            </a:r>
-          </a:p>
-          <a:p>
-            <a:pPr>
-              <a:spcAft>
-                <a:spcPts val="600"/>
-              </a:spcAft>
-            </a:pPr>
-            <a:r>
-              <a:rPr sz="1500">
-                <a:solidFill>
-                  <a:srgbClr val="22282E"/>
-                </a:solidFill>
-              </a:rPr>
-              <a:t>•  Un objetivo autorizado propio: una VM vulnerable de tu laboratorio (p. ej. el</a:t>
-            </a:r>
-          </a:p>
-          <a:p>
-            <a:pPr>
-              <a:spcAft>
-                <a:spcPts val="600"/>
-              </a:spcAft>
-            </a:pPr>
-            <a:r>
-              <a:rPr sz="1500">
-                <a:solidFill>
-                  <a:srgbClr val="22282E"/>
-                </a:solidFill>
-              </a:rPr>
-              <a:t>•  lab appsec-web o una VM tipo Metasploitable en red aislada).</a:t>
-            </a:r>
-          </a:p>
-          <a:p>
-            <a:pPr>
-              <a:spcAft>
-                <a:spcPts val="600"/>
-              </a:spcAft>
-            </a:pPr>
-            <a:r>
-              <a:rPr sz="1500">
-                <a:solidFill>
-                  <a:srgbClr val="22282E"/>
-                </a:solidFill>
-              </a:rPr>
-              <a:t>•  Sigue las instrucciones oficiales del repositorio para la instalación exacta.</a:t>
+              <a:t>•  Término — Definición</a:t>
+            </a:r>
+          </a:p>
+          <a:p>
+            <a:pPr>
+              <a:spcAft>
+                <a:spcPts val="600"/>
+              </a:spcAft>
+            </a:pPr>
+            <a:r>
+              <a:rPr sz="1500">
+                <a:solidFill>
+                  <a:srgbClr val="22282E"/>
+                </a:solidFill>
+              </a:rPr>
+              <a:t>•  Broker de herramientas — Capa que valida y media cada ejecución.</a:t>
+            </a:r>
+          </a:p>
+          <a:p>
+            <a:pPr>
+              <a:spcAft>
+                <a:spcPts val="600"/>
+              </a:spcAft>
+            </a:pPr>
+            <a:r>
+              <a:rPr sz="1500">
+                <a:solidFill>
+                  <a:srgbClr val="22282E"/>
+                </a:solidFill>
+              </a:rPr>
+              <a:t>•  Guardrail — Capa que reduce una capacidad o detecta su uso; no garantía absoluta.</a:t>
+            </a:r>
+          </a:p>
+          <a:p>
+            <a:pPr>
+              <a:spcAft>
+                <a:spcPts val="600"/>
+              </a:spcAft>
+            </a:pPr>
+            <a:r>
+              <a:rPr sz="1500">
+                <a:solidFill>
+                  <a:srgbClr val="22282E"/>
+                </a:solidFill>
+              </a:rPr>
+              <a:t>•  Audit trail — Registro ordenado de solicitudes, decisiones, ejecuciones y resultados.</a:t>
             </a:r>
           </a:p>
         </p:txBody>
@@ -4420,7 +4916,7 @@
                   <a:srgbClr val="0B3D2E"/>
                 </a:solidFill>
               </a:rPr>
-              <a:t>🧪 Laboratorio guiado</a:t>
+              <a:t>✅ Criterio de dominio</a:t>
             </a:r>
           </a:p>
         </p:txBody>
@@ -4458,97 +4954,7 @@
                   <a:srgbClr val="22282E"/>
                 </a:solidFill>
               </a:rPr>
-              <a:t>•  Clonar e inicializar (según el README oficial del proyecto):</a:t>
-            </a:r>
-          </a:p>
-          <a:p>
-            <a:pPr>
-              <a:spcAft>
-                <a:spcPts val="600"/>
-              </a:spcAft>
-            </a:pPr>
-            <a:r>
-              <a:rPr sz="1500">
-                <a:solidFill>
-                  <a:srgbClr val="22282E"/>
-                </a:solidFill>
-              </a:rPr>
-              <a:t>•  git clone https://github.com/pabpereza/kali-mcp.git</a:t>
-            </a:r>
-          </a:p>
-          <a:p>
-            <a:pPr>
-              <a:spcAft>
-                <a:spcPts val="600"/>
-              </a:spcAft>
-            </a:pPr>
-            <a:r>
-              <a:rPr sz="1500">
-                <a:solidFill>
-                  <a:srgbClr val="22282E"/>
-                </a:solidFill>
-              </a:rPr>
-              <a:t>•  cd kali-mcp</a:t>
-            </a:r>
-          </a:p>
-          <a:p>
-            <a:pPr>
-              <a:spcAft>
-                <a:spcPts val="600"/>
-              </a:spcAft>
-            </a:pPr>
-            <a:r>
-              <a:rPr sz="1500">
-                <a:solidFill>
-                  <a:srgbClr val="22282E"/>
-                </a:solidFill>
-              </a:rPr>
-              <a:t>•  ./init.sh            # levanta el contenedor Kali y el gateway MCP</a:t>
-            </a:r>
-          </a:p>
-          <a:p>
-            <a:pPr>
-              <a:spcAft>
-                <a:spcPts val="600"/>
-              </a:spcAft>
-            </a:pPr>
-            <a:r>
-              <a:rPr sz="1500">
-                <a:solidFill>
-                  <a:srgbClr val="22282E"/>
-                </a:solidFill>
-              </a:rPr>
-              <a:t>•  Conectar el agente. Configura tu cliente de IA para usar el servidor MCP de kali-mcp (archivo de configuración .mcp.json del proyecto).</a:t>
-            </a:r>
-          </a:p>
-          <a:p>
-            <a:pPr>
-              <a:spcAft>
-                <a:spcPts val="600"/>
-              </a:spcAft>
-            </a:pPr>
-            <a:r>
-              <a:rPr sz="1500">
-                <a:solidFill>
-                  <a:srgbClr val="22282E"/>
-                </a:solidFill>
-              </a:rPr>
-              <a:t>•  Definir alcance. Ejecuta el flujo de inicio y declara solo la IP de tu VM de laboratorio como objetivo autorizado.</a:t>
-            </a:r>
-          </a:p>
-          <a:p>
-            <a:pPr>
-              <a:spcAft>
-                <a:spcPts val="600"/>
-              </a:spcAft>
-            </a:pPr>
-            <a:r>
-              <a:rPr sz="1500">
-                <a:solidFill>
-                  <a:srgbClr val="22282E"/>
-                </a:solidFill>
-              </a:rPr>
-              <a:t>•  Observar, no delegar a ciegas. Pide un reconocimiento y revisa cada herramienta que el agente propone antes de aprobar acciones activas.</a:t>
+              <a:t>•  El alumno demuestra dominio cuando reproduce el flujo completo, puede atribuir cada acción, evita que texto no confiable otorgue autoridad y explica qué control contiene un fallo del modelo.</a:t>
             </a:r>
           </a:p>
         </p:txBody>
@@ -4599,7 +5005,7 @@
                   <a:srgbClr val="0B3D2E"/>
                 </a:solidFill>
               </a:rPr>
-              <a:t>✍️ Ejercicios</a:t>
+              <a:t>📖 Definiciones y características</a:t>
             </a:r>
           </a:p>
         </p:txBody>
@@ -4637,67 +5043,97 @@
                   <a:srgbClr val="22282E"/>
                 </a:solidFill>
               </a:rPr>
-              <a:t>•  Dibuja la arquitectura de kali-mcp e indica dónde está el aislamiento.</a:t>
-            </a:r>
-          </a:p>
-          <a:p>
-            <a:pPr>
-              <a:spcAft>
-                <a:spcPts val="600"/>
-              </a:spcAft>
-            </a:pPr>
-            <a:r>
-              <a:rPr sz="1500">
-                <a:solidFill>
-                  <a:srgbClr val="22282E"/>
-                </a:solidFill>
-              </a:rPr>
-              <a:t>•  ¿Por qué es importante que las herramientas corran en un contenedor y no en tu host?</a:t>
-            </a:r>
-          </a:p>
-          <a:p>
-            <a:pPr>
-              <a:spcAft>
-                <a:spcPts val="600"/>
-              </a:spcAft>
-            </a:pPr>
-            <a:r>
-              <a:rPr sz="1500">
-                <a:solidFill>
-                  <a:srgbClr val="22282E"/>
-                </a:solidFill>
-              </a:rPr>
-              <a:t>•  Define el alcance correcto para un lab con una sola VM objetivo.</a:t>
-            </a:r>
-          </a:p>
-          <a:p>
-            <a:pPr>
-              <a:spcAft>
-                <a:spcPts val="600"/>
-              </a:spcAft>
-            </a:pPr>
-            <a:r>
-              <a:rPr sz="1500">
-                <a:solidFill>
-                  <a:srgbClr val="22282E"/>
-                </a:solidFill>
-              </a:rPr>
-              <a:t>•  Enumera 3 acciones que exigirías aprobar manualmente aunque el agente las proponga.</a:t>
-            </a:r>
-          </a:p>
-          <a:p>
-            <a:pPr>
-              <a:spcAft>
-                <a:spcPts val="600"/>
-              </a:spcAft>
-            </a:pPr>
-            <a:r>
-              <a:rPr sz="1500">
-                <a:solidFill>
-                  <a:srgbClr val="22282E"/>
-                </a:solidFill>
-              </a:rPr>
-              <a:t>•  ¿Cómo verificarías que un hallazgo del informe no es una alucinación?</a:t>
+              <a:t>•  kali-mcp</a:t>
+            </a:r>
+          </a:p>
+          <a:p>
+            <a:pPr>
+              <a:spcAft>
+                <a:spcPts val="600"/>
+              </a:spcAft>
+            </a:pPr>
+            <a:r>
+              <a:rPr sz="1500">
+                <a:solidFill>
+                  <a:srgbClr val="22282E"/>
+                </a:solidFill>
+              </a:rPr>
+              <a:t>•  Proyecto MIT que expone las herramientas de Kali a un agente de IA vía MCP. Característica clave: las herramientas corren en un contenedor Docker aislado, no en tu host.</a:t>
+            </a:r>
+          </a:p>
+          <a:p>
+            <a:pPr>
+              <a:spcAft>
+                <a:spcPts val="600"/>
+              </a:spcAft>
+            </a:pPr>
+            <a:r>
+              <a:rPr sz="1500">
+                <a:solidFill>
+                  <a:srgbClr val="22282E"/>
+                </a:solidFill>
+              </a:rPr>
+              <a:t>•  Gateway MCP</a:t>
+            </a:r>
+          </a:p>
+          <a:p>
+            <a:pPr>
+              <a:spcAft>
+                <a:spcPts val="600"/>
+              </a:spcAft>
+            </a:pPr>
+            <a:r>
+              <a:rPr sz="1500">
+                <a:solidFill>
+                  <a:srgbClr val="22282E"/>
+                </a:solidFill>
+              </a:rPr>
+              <a:t>•  Componente que traduce las peticiones del protocolo MCP en ejecuciones de herramientas dentro del contenedor y devuelve los resultados al agente.</a:t>
+            </a:r>
+          </a:p>
+          <a:p>
+            <a:pPr>
+              <a:spcAft>
+                <a:spcPts val="600"/>
+              </a:spcAft>
+            </a:pPr>
+            <a:r>
+              <a:rPr sz="1500">
+                <a:solidFill>
+                  <a:srgbClr val="22282E"/>
+                </a:solidFill>
+              </a:rPr>
+              <a:t>•  Comando de flujo (/kali-start, /kali-pentest, /kali-finish)</a:t>
+            </a:r>
+          </a:p>
+          <a:p>
+            <a:pPr>
+              <a:spcAft>
+                <a:spcPts val="600"/>
+              </a:spcAft>
+            </a:pPr>
+            <a:r>
+              <a:rPr sz="1500">
+                <a:solidFill>
+                  <a:srgbClr val="22282E"/>
+                </a:solidFill>
+              </a:rPr>
+              <a:t>•  Playbooks de alto nivel que definen alcance, orquestan el análisis y compilan el informe, respectivamente.</a:t>
+            </a:r>
+          </a:p>
+          <a:p>
+            <a:pPr>
+              <a:spcAft>
+                <a:spcPts val="600"/>
+              </a:spcAft>
+            </a:pPr>
+            <a:r>
+              <a:rPr sz="1500">
+                <a:solidFill>
+                  <a:srgbClr val="22282E"/>
+                </a:solidFill>
+              </a:rPr>
+              <a:t>•  Alcance (scope)</a:t>
             </a:r>
           </a:p>
         </p:txBody>
@@ -4748,7 +5184,7 @@
                   <a:srgbClr val="0B3D2E"/>
                 </a:solidFill>
               </a:rPr>
-              <a:t>📝 Reto verificable</a:t>
+              <a:t>🧰 Herramientas y preparación</a:t>
             </a:r>
           </a:p>
         </p:txBody>
@@ -4786,67 +5222,52 @@
                   <a:srgbClr val="22282E"/>
                 </a:solidFill>
               </a:rPr>
-              <a:t>•  Monta kali-mcp contra una VM vulnerable de tu propiedad y ejecuta un flujo de</a:t>
-            </a:r>
-          </a:p>
-          <a:p>
-            <a:pPr>
-              <a:spcAft>
-                <a:spcPts val="600"/>
-              </a:spcAft>
-            </a:pPr>
-            <a:r>
-              <a:rPr sz="1500">
-                <a:solidFill>
-                  <a:srgbClr val="22282E"/>
-                </a:solidFill>
-              </a:rPr>
-              <a:t>•  reconocimiento supervisado, terminando con un informe.</a:t>
-            </a:r>
-          </a:p>
-          <a:p>
-            <a:pPr>
-              <a:spcAft>
-                <a:spcPts val="600"/>
-              </a:spcAft>
-            </a:pPr>
-            <a:r>
-              <a:rPr sz="1500">
-                <a:solidFill>
-                  <a:srgbClr val="22282E"/>
-                </a:solidFill>
-              </a:rPr>
-              <a:t>•  Criterio de aceptación: el alcance se limitó a tu VM; aprobaste manualmente las acciones</a:t>
-            </a:r>
-          </a:p>
-          <a:p>
-            <a:pPr>
-              <a:spcAft>
-                <a:spcPts val="600"/>
-              </a:spcAft>
-            </a:pPr>
-            <a:r>
-              <a:rPr sz="1500">
-                <a:solidFill>
-                  <a:srgbClr val="22282E"/>
-                </a:solidFill>
-              </a:rPr>
-              <a:t>•  activas; el informe lista hallazgos que puedes reproducir manualmente con la herramienta</a:t>
-            </a:r>
-          </a:p>
-          <a:p>
-            <a:pPr>
-              <a:spcAft>
-                <a:spcPts val="600"/>
-              </a:spcAft>
-            </a:pPr>
-            <a:r>
-              <a:rPr sz="1500">
-                <a:solidFill>
-                  <a:srgbClr val="22282E"/>
-                </a:solidFill>
-              </a:rPr>
-              <a:t>•  correspondiente (no confías ciegamente en la IA).</a:t>
+              <a:t>•  Docker y Docker Compose (clase 022) y un cliente de IA con MCP (p. ej. Claude Code).</a:t>
+            </a:r>
+          </a:p>
+          <a:p>
+            <a:pPr>
+              <a:spcAft>
+                <a:spcPts val="600"/>
+              </a:spcAft>
+            </a:pPr>
+            <a:r>
+              <a:rPr sz="1500">
+                <a:solidFill>
+                  <a:srgbClr val="22282E"/>
+                </a:solidFill>
+              </a:rPr>
+              <a:t>•  Un objetivo autorizado propio: una VM vulnerable de tu laboratorio (p. ej. el</a:t>
+            </a:r>
+          </a:p>
+          <a:p>
+            <a:pPr>
+              <a:spcAft>
+                <a:spcPts val="600"/>
+              </a:spcAft>
+            </a:pPr>
+            <a:r>
+              <a:rPr sz="1500">
+                <a:solidFill>
+                  <a:srgbClr val="22282E"/>
+                </a:solidFill>
+              </a:rPr>
+              <a:t>•  lab appsec-web o una VM tipo Metasploitable en red aislada).</a:t>
+            </a:r>
+          </a:p>
+          <a:p>
+            <a:pPr>
+              <a:spcAft>
+                <a:spcPts val="600"/>
+              </a:spcAft>
+            </a:pPr>
+            <a:r>
+              <a:rPr sz="1500">
+                <a:solidFill>
+                  <a:srgbClr val="22282E"/>
+                </a:solidFill>
+              </a:rPr>
+              <a:t>•  Sigue las instrucciones oficiales del repositorio para la instalación exacta.</a:t>
             </a:r>
           </a:p>
         </p:txBody>
